--- a/media/exports/reports/2026-10/growth-services.pptx
+++ b/media/exports/reports/2026-10/growth-services.pptx
@@ -246,76 +246,76 @@
                 <c:formatCode>$#,##0;[Red]($#,##0);"-"</c:formatCode>
                 <c:ptCount val="24"/>
                 <c:pt idx="0">
-                  <c:v>108140</c:v>
+                  <c:v>118390</c:v>
                 </c:pt>
                 <c:pt idx="1">
-                  <c:v>114895</c:v>
+                  <c:v>125715</c:v>
                 </c:pt>
                 <c:pt idx="2">
-                  <c:v>88250</c:v>
+                  <c:v>96560</c:v>
                 </c:pt>
                 <c:pt idx="3">
-                  <c:v>111010</c:v>
+                  <c:v>121275</c:v>
                 </c:pt>
                 <c:pt idx="4">
-                  <c:v>77175</c:v>
+                  <c:v>84340</c:v>
                 </c:pt>
                 <c:pt idx="5">
-                  <c:v>63970</c:v>
+                  <c:v>69985</c:v>
                 </c:pt>
                 <c:pt idx="6">
-                  <c:v>95555</c:v>
+                  <c:v>104970</c:v>
                 </c:pt>
                 <c:pt idx="7">
-                  <c:v>90220</c:v>
+                  <c:v>99060</c:v>
                 </c:pt>
                 <c:pt idx="8">
-                  <c:v>86320</c:v>
+                  <c:v>94805</c:v>
                 </c:pt>
                 <c:pt idx="9">
-                  <c:v>61475</c:v>
+                  <c:v>67745</c:v>
                 </c:pt>
                 <c:pt idx="10">
-                  <c:v>59535</c:v>
+                  <c:v>65650</c:v>
                 </c:pt>
                 <c:pt idx="11">
-                  <c:v>71260</c:v>
+                  <c:v>78550</c:v>
                 </c:pt>
                 <c:pt idx="12">
-                  <c:v>83940</c:v>
+                  <c:v>92575</c:v>
                 </c:pt>
                 <c:pt idx="13">
-                  <c:v>69420</c:v>
+                  <c:v>76600</c:v>
                 </c:pt>
                 <c:pt idx="14">
-                  <c:v>92370</c:v>
+                  <c:v>102350</c:v>
                 </c:pt>
                 <c:pt idx="15">
-                  <c:v>100055</c:v>
+                  <c:v>110835</c:v>
                 </c:pt>
                 <c:pt idx="16">
-                  <c:v>109865</c:v>
+                  <c:v>121215</c:v>
                 </c:pt>
                 <c:pt idx="17">
-                  <c:v>80590</c:v>
+                  <c:v>88665</c:v>
                 </c:pt>
                 <c:pt idx="18">
-                  <c:v>77090</c:v>
+                  <c:v>84920</c:v>
                 </c:pt>
                 <c:pt idx="19">
-                  <c:v>115550</c:v>
+                  <c:v>127580</c:v>
                 </c:pt>
                 <c:pt idx="20">
-                  <c:v>120755</c:v>
+                  <c:v>133455</c:v>
                 </c:pt>
                 <c:pt idx="21">
-                  <c:v>114640</c:v>
+                  <c:v>126500</c:v>
                 </c:pt>
                 <c:pt idx="22">
-                  <c:v>131850</c:v>
+                  <c:v>145330</c:v>
                 </c:pt>
                 <c:pt idx="23">
-                  <c:v>44605</c:v>
+                  <c:v>49055</c:v>
                 </c:pt>
               </c:numCache>
             </c:numRef>
@@ -364,7 +364,7 @@
         <c:axId val="-2100718248"/>
         <c:scaling>
           <c:orientation val="minMax"/>
-          <c:max val="150000.0"/>
+          <c:max val="200000.0"/>
           <c:min val="0.0"/>
         </c:scaling>
         <c:delete val="0"/>
@@ -558,76 +558,76 @@
                 <c:formatCode>$#,##0;[Red]($#,##0);"-"</c:formatCode>
                 <c:ptCount val="24"/>
                 <c:pt idx="0">
-                  <c:v>88540</c:v>
+                  <c:v>96790</c:v>
                 </c:pt>
                 <c:pt idx="1">
-                  <c:v>94695</c:v>
+                  <c:v>103515</c:v>
                 </c:pt>
                 <c:pt idx="2">
-                  <c:v>66850</c:v>
+                  <c:v>73060</c:v>
                 </c:pt>
                 <c:pt idx="3">
-                  <c:v>84410</c:v>
+                  <c:v>92075</c:v>
                 </c:pt>
                 <c:pt idx="4">
-                  <c:v>48975</c:v>
+                  <c:v>53340</c:v>
                 </c:pt>
                 <c:pt idx="5">
-                  <c:v>37570</c:v>
+                  <c:v>40885</c:v>
                 </c:pt>
                 <c:pt idx="6">
-                  <c:v>59755</c:v>
+                  <c:v>65570</c:v>
                 </c:pt>
                 <c:pt idx="7">
-                  <c:v>64520</c:v>
+                  <c:v>70760</c:v>
                 </c:pt>
                 <c:pt idx="8">
-                  <c:v>64820</c:v>
+                  <c:v>71205</c:v>
                 </c:pt>
                 <c:pt idx="9">
-                  <c:v>38775</c:v>
+                  <c:v>42845</c:v>
                 </c:pt>
                 <c:pt idx="10">
-                  <c:v>38035</c:v>
+                  <c:v>42050</c:v>
                 </c:pt>
                 <c:pt idx="11">
-                  <c:v>45860</c:v>
+                  <c:v>50650</c:v>
                 </c:pt>
                 <c:pt idx="12">
-                  <c:v>46840</c:v>
+                  <c:v>51775</c:v>
                 </c:pt>
                 <c:pt idx="13">
-                  <c:v>29520</c:v>
+                  <c:v>32800</c:v>
                 </c:pt>
                 <c:pt idx="14">
-                  <c:v>60170</c:v>
+                  <c:v>66950</c:v>
                 </c:pt>
                 <c:pt idx="15">
-                  <c:v>62955</c:v>
+                  <c:v>70035</c:v>
                 </c:pt>
                 <c:pt idx="16">
-                  <c:v>75165</c:v>
+                  <c:v>83115</c:v>
                 </c:pt>
                 <c:pt idx="17">
-                  <c:v>47090</c:v>
+                  <c:v>51865</c:v>
                 </c:pt>
                 <c:pt idx="18">
-                  <c:v>43590</c:v>
+                  <c:v>48120</c:v>
                 </c:pt>
                 <c:pt idx="19">
-                  <c:v>76650</c:v>
+                  <c:v>84880</c:v>
                 </c:pt>
                 <c:pt idx="20">
-                  <c:v>79455</c:v>
+                  <c:v>88055</c:v>
                 </c:pt>
                 <c:pt idx="21">
-                  <c:v>75740</c:v>
+                  <c:v>83800</c:v>
                 </c:pt>
                 <c:pt idx="22">
-                  <c:v>85950</c:v>
+                  <c:v>94830</c:v>
                 </c:pt>
                 <c:pt idx="23">
-                  <c:v>12105</c:v>
+                  <c:v>13355</c:v>
                 </c:pt>
               </c:numCache>
             </c:numRef>
@@ -676,7 +676,7 @@
         <c:axId val="-2100718248"/>
         <c:scaling>
           <c:orientation val="minMax"/>
-          <c:max val="100000.0"/>
+          <c:max val="125000.0"/>
           <c:min val="0.0"/>
         </c:scaling>
         <c:delete val="0"/>
@@ -711,7 +711,7 @@
         <c:crossAx val="-2101159928"/>
         <c:crosses val="autoZero"/>
         <c:crossBetween val="midCat"/>
-        <c:majorUnit val="20000.0"/>
+        <c:majorUnit val="25000.0"/>
       </c:valAx>
     </c:plotArea>
     <c:plotVisOnly val="1"/>
@@ -870,76 +870,76 @@
                 <c:formatCode>$#,##0;[Red]($#,##0);"-"</c:formatCode>
                 <c:ptCount val="24"/>
                 <c:pt idx="0">
-                  <c:v>15000</c:v>
+                  <c:v>16500</c:v>
                 </c:pt>
                 <c:pt idx="1">
-                  <c:v>15000</c:v>
+                  <c:v>16500</c:v>
                 </c:pt>
                 <c:pt idx="2">
-                  <c:v>15000</c:v>
+                  <c:v>16500</c:v>
                 </c:pt>
                 <c:pt idx="3">
-                  <c:v>15000</c:v>
+                  <c:v>16500</c:v>
                 </c:pt>
                 <c:pt idx="4">
-                  <c:v>21800</c:v>
+                  <c:v>24000</c:v>
                 </c:pt>
                 <c:pt idx="5">
-                  <c:v>21800</c:v>
+                  <c:v>24000</c:v>
                 </c:pt>
                 <c:pt idx="6">
-                  <c:v>21800</c:v>
+                  <c:v>24000</c:v>
                 </c:pt>
                 <c:pt idx="7">
-                  <c:v>21800</c:v>
+                  <c:v>24000</c:v>
                 </c:pt>
                 <c:pt idx="8">
-                  <c:v>16300</c:v>
+                  <c:v>17900</c:v>
                 </c:pt>
                 <c:pt idx="9">
-                  <c:v>16300</c:v>
+                  <c:v>17900</c:v>
                 </c:pt>
                 <c:pt idx="10">
-                  <c:v>16300</c:v>
+                  <c:v>17900</c:v>
                 </c:pt>
                 <c:pt idx="11">
-                  <c:v>16300</c:v>
+                  <c:v>17900</c:v>
                 </c:pt>
                 <c:pt idx="12">
-                  <c:v>28300</c:v>
+                  <c:v>31100</c:v>
                 </c:pt>
                 <c:pt idx="13">
-                  <c:v>28300</c:v>
+                  <c:v>31100</c:v>
                 </c:pt>
                 <c:pt idx="14">
-                  <c:v>28300</c:v>
+                  <c:v>31100</c:v>
                 </c:pt>
                 <c:pt idx="15">
-                  <c:v>28300</c:v>
+                  <c:v>31100</c:v>
                 </c:pt>
                 <c:pt idx="16">
-                  <c:v>28300</c:v>
+                  <c:v>31100</c:v>
                 </c:pt>
                 <c:pt idx="17">
-                  <c:v>28300</c:v>
+                  <c:v>31100</c:v>
                 </c:pt>
                 <c:pt idx="18">
-                  <c:v>28300</c:v>
+                  <c:v>31100</c:v>
                 </c:pt>
                 <c:pt idx="19">
-                  <c:v>32500</c:v>
+                  <c:v>35700</c:v>
                 </c:pt>
                 <c:pt idx="20">
-                  <c:v>32500</c:v>
+                  <c:v>35700</c:v>
                 </c:pt>
                 <c:pt idx="21">
-                  <c:v>32500</c:v>
+                  <c:v>35700</c:v>
                 </c:pt>
                 <c:pt idx="22">
-                  <c:v>32500</c:v>
+                  <c:v>35700</c:v>
                 </c:pt>
                 <c:pt idx="23">
-                  <c:v>32500</c:v>
+                  <c:v>35700</c:v>
                 </c:pt>
               </c:numCache>
             </c:numRef>
@@ -1182,73 +1182,73 @@
                 <c:formatCode>$#,##0;[Red]($#,##0);"-"</c:formatCode>
                 <c:ptCount val="24"/>
                 <c:pt idx="0">
-                  <c:v>4600</c:v>
+                  <c:v>5100</c:v>
                 </c:pt>
                 <c:pt idx="1">
-                  <c:v>5200</c:v>
+                  <c:v>5700</c:v>
                 </c:pt>
                 <c:pt idx="2">
-                  <c:v>6400</c:v>
+                  <c:v>7000</c:v>
                 </c:pt>
                 <c:pt idx="3">
-                  <c:v>11600</c:v>
+                  <c:v>12700</c:v>
                 </c:pt>
                 <c:pt idx="4">
-                  <c:v>6400</c:v>
+                  <c:v>7000</c:v>
                 </c:pt>
                 <c:pt idx="5">
-                  <c:v>4600</c:v>
+                  <c:v>5100</c:v>
                 </c:pt>
                 <c:pt idx="6">
-                  <c:v>14000</c:v>
+                  <c:v>15400</c:v>
                 </c:pt>
                 <c:pt idx="7">
-                  <c:v>3900</c:v>
+                  <c:v>4300</c:v>
                 </c:pt>
                 <c:pt idx="8">
-                  <c:v>5200</c:v>
+                  <c:v>5700</c:v>
                 </c:pt>
                 <c:pt idx="9">
-                  <c:v>6400</c:v>
+                  <c:v>7000</c:v>
                 </c:pt>
                 <c:pt idx="10">
-                  <c:v>5200</c:v>
+                  <c:v>5700</c:v>
                 </c:pt>
                 <c:pt idx="11">
-                  <c:v>9100</c:v>
+                  <c:v>10000</c:v>
                 </c:pt>
                 <c:pt idx="12">
-                  <c:v>8800</c:v>
+                  <c:v>9700</c:v>
                 </c:pt>
                 <c:pt idx="13">
-                  <c:v>11600</c:v>
+                  <c:v>12700</c:v>
                 </c:pt>
                 <c:pt idx="14">
-                  <c:v>3900</c:v>
+                  <c:v>4300</c:v>
                 </c:pt>
                 <c:pt idx="15">
-                  <c:v>8800</c:v>
+                  <c:v>9700</c:v>
                 </c:pt>
                 <c:pt idx="16">
-                  <c:v>6400</c:v>
+                  <c:v>7000</c:v>
                 </c:pt>
                 <c:pt idx="17">
-                  <c:v>5200</c:v>
+                  <c:v>5700</c:v>
                 </c:pt>
                 <c:pt idx="18">
-                  <c:v>5200</c:v>
+                  <c:v>5700</c:v>
                 </c:pt>
                 <c:pt idx="19">
-                  <c:v>6400</c:v>
+                  <c:v>7000</c:v>
                 </c:pt>
                 <c:pt idx="20">
-                  <c:v>8800</c:v>
+                  <c:v>9700</c:v>
                 </c:pt>
                 <c:pt idx="21">
-                  <c:v>6400</c:v>
+                  <c:v>7000</c:v>
                 </c:pt>
                 <c:pt idx="22">
-                  <c:v>13400</c:v>
+                  <c:v>14800</c:v>
                 </c:pt>
                 <c:pt idx="23">
                   <c:v>0</c:v>
@@ -1300,7 +1300,7 @@
         <c:axId val="-2100718248"/>
         <c:scaling>
           <c:orientation val="minMax"/>
-          <c:max val="15000.0"/>
+          <c:max val="20000.0"/>
           <c:min val="0.0"/>
         </c:scaling>
         <c:delete val="0"/>
@@ -1825,7 +1825,7 @@
           <a:lstStyle/>
           <a:p>
             <a:r>
-              <a:t>Services · All. October so far against October last year: (37.4%); Year to date against the same period last year: 47.8%; Gross margin, year to date: 60.3%. Revenue is 47.8% up on the same period last year, year to date ($411,850 against $278,590). Retainers make the highest gross margin (68.5%); Projects the lowest (56.3%). The business needs 40.0% gross margin just to cover overheads. Projects: 56.3% gross margin, 16.3 points over the 40.0% target ($41,250 ahead on $253,250 this financial year to date). Retainers: 68.5% gross margin, 28.5 points over the 40.0% target ($37,020 ahead on $130,000 this financial year to date).</a:t>
+              <a:t>Services · All. October so far against October last year: (37.5%); Year to date against the same period last year: 48.1%; Gross margin, year to date: 64.0%. Revenue is 48.1% up on the same period last year, year to date ($454,340 against $306,750). Retainers make the highest gross margin (71.3%); Projects the lowest (60.5%). The business needs 45.8% gross margin just to cover overheads. Projects: 60.5% gross margin, 20.5 points over the 40.0% target ($57,324 ahead on $280,040 this financial year to date). Retainers: 71.3% gross margin, 31.3 points over the 40.0% target ($44,700 ahead on $142,800 this financial year to date).</a:t>
             </a:r>
           </a:p>
         </p:txBody>
@@ -1895,7 +1895,7 @@
           <a:lstStyle/>
           <a:p>
             <a:r>
-              <a:t>Services · Projects. October so far against October last year: (73.6%); Year to date against the same period last year: 35.1%; Gross margin, year to date: 56.3%. Projects brought in $253,250 this financial year to date, 35.1% on the same period last year (slower than the business as a whole, 47.8%), at a 56.3% gross margin (below the 60.3% overall). Projects: 56.3% gross margin, 16.3 points over the 40.0% target ($41,250 ahead on $253,250 this financial year to date).</a:t>
+              <a:t>Services · Projects. October so far against October last year: (73.6%); Year to date against the same period last year: 35.4%; Gross margin, year to date: 60.5%. Projects brought in $280,040 this financial year to date, 35.4% on the same period last year (slower than the business as a whole, 48.1%), at a 60.5% gross margin (below the 64.0% overall). Projects: 60.5% gross margin, 20.5 points over the 40.0% target ($57,324 ahead on $280,040 this financial year to date).</a:t>
             </a:r>
           </a:p>
         </p:txBody>
@@ -1965,7 +1965,7 @@
           <a:lstStyle/>
           <a:p>
             <a:r>
-              <a:t>Services · Retainers. October so far against October last year: 99.4%; Year to date against the same period last year: 99.4%; Gross margin, year to date: 68.5%. Retainers brought in $130,000 this financial year to date, 99.4% on the same period last year (faster than the business as a whole, 47.8%), at a 68.5% gross margin (above the 60.3% overall). Retainers: 68.5% gross margin, 28.5 points over the 40.0% target ($37,020 ahead on $130,000 this financial year to date).</a:t>
+              <a:t>Services · Retainers. October so far against October last year: 99.4%; Year to date against the same period last year: 99.4%; Gross margin, year to date: 71.3%. Retainers brought in $142,800 this financial year to date, 99.4% on the same period last year (faster than the business as a whole, 48.1%), at a 71.3% gross margin (above the 64.0% overall). Retainers: 71.3% gross margin, 31.3 points over the 40.0% target ($44,700 ahead on $142,800 this financial year to date).</a:t>
             </a:r>
           </a:p>
         </p:txBody>
@@ -2035,7 +2035,7 @@
           <a:lstStyle/>
           <a:p>
             <a:r>
-              <a:t>Services · Training. October so far against October last year: (100.0%); Year to date against the same period last year: 10.4%; Gross margin, year to date: 58.0%. Training brought in $28,600 this financial year to date, 10.4% on the same period last year (slower than the business as a whole, 47.8%), at a 58.0% gross margin (below the 60.3% overall). Training: 58.0% gross margin, 18.0 points over the 40.0% target ($5,160 ahead on $28,600 this financial year to date).</a:t>
+              <a:t>Services · Training. October so far against October last year: (100.0%); Year to date against the same period last year: 10.9%; Gross margin, year to date: 61.9%. Training brought in $31,500 this financial year to date, 10.9% on the same period last year (slower than the business as a whole, 48.1%), at a 61.9% gross margin (below the 64.0% overall). Training: 61.9% gross margin, 21.9 points over the 40.0% target ($6,900 ahead on $31,500 this financial year to date).</a:t>
             </a:r>
           </a:p>
         </p:txBody>
@@ -2105,7 +2105,7 @@
           <a:lstStyle/>
           <a:p>
             <a:r>
-              <a:t>By type of work: financial year to date (Jul to Oct 2026) against the same period last year · Services. From gross margin to profit · latest closed month: September: October is still in progress and wages are paid fortnightly, so a part month can't be bridged: this is September, the latest closed month. September's client work made $68,410 gross margin (51.9%). Consultant time not charged to client work took $660 and overheads $52,140, leaving $15,610 profit before tax (11.8% of revenue). To cover overheads, client work needs a 40.0% gross margin on average.</a:t>
+              <a:t>By type of work: financial year to date (Jul to Oct 2026) against the same period last year · Services. From gross margin to profit · latest closed month: September: October is still in progress and wages are paid fortnightly, so a part month can't be bridged: this is September, the latest closed month. September's client work made $81,890 gross margin (56.3%). Consultant time not charged to client work took $14,352 and overheads $52,140, leaving $15,398 profit before tax (10.6% of revenue). To cover overheads, client work needs a 45.8% gross margin on average.</a:t>
             </a:r>
           </a:p>
         </p:txBody>
@@ -5504,7 +5504,7 @@
                 </a:solidFill>
                 <a:latin typeface="Roboto"/>
               </a:rPr>
-              <a:t>Data retrieved 2pm, Tue 6 Oct 2026 · Generated 8 Oct 2026, 9:35am · Sample data · Made with Python (python-pptx)</a:t>
+              <a:t>Data retrieved 2pm, Tue 6 Oct 2026 · Generated 9 Oct 2026, 8:41am · Sample data · Made with Python (python-pptx)</a:t>
             </a:r>
           </a:p>
         </p:txBody>
@@ -5850,7 +5850,7 @@
                 </a:solidFill>
                 <a:latin typeface="Roboto"/>
               </a:rPr>
-              <a:t>(37.4%)</a:t>
+              <a:t>(37.5%)</a:t>
             </a:r>
           </a:p>
         </p:txBody>
@@ -5889,7 +5889,7 @@
                 </a:solidFill>
                 <a:latin typeface="Roboto"/>
               </a:rPr>
-              <a:t>$44,605 against $71,260</a:t>
+              <a:t>$49,055 against $78,550</a:t>
             </a:r>
           </a:p>
         </p:txBody>
@@ -6016,7 +6016,7 @@
                 </a:solidFill>
                 <a:latin typeface="Roboto"/>
               </a:rPr>
-              <a:t>47.8%</a:t>
+              <a:t>48.1%</a:t>
             </a:r>
           </a:p>
         </p:txBody>
@@ -6055,7 +6055,7 @@
                 </a:solidFill>
                 <a:latin typeface="Roboto"/>
               </a:rPr>
-              <a:t>$411,850 against $278,590</a:t>
+              <a:t>$454,340 against $306,750</a:t>
             </a:r>
           </a:p>
         </p:txBody>
@@ -6182,7 +6182,7 @@
                 </a:solidFill>
                 <a:latin typeface="Roboto"/>
               </a:rPr>
-              <a:t>60.3%</a:t>
+              <a:t>64.0%</a:t>
             </a:r>
           </a:p>
         </p:txBody>
@@ -6221,7 +6221,7 @@
                 </a:solidFill>
                 <a:latin typeface="Roboto"/>
               </a:rPr>
-              <a:t>$248,170 before overheads</a:t>
+              <a:t>$290,660 before overheads</a:t>
             </a:r>
           </a:p>
         </p:txBody>
@@ -6366,7 +6366,7 @@
                 </a:solidFill>
                 <a:latin typeface="Roboto"/>
               </a:rPr>
-              <a:t>Revenue is 47.8% up on the same period last year, year to date ($411,850 against $278,590). Retainers make the highest gross margin (68.5%); Projects the lowest (56.3%). The business needs 40.0% gross margin just to cover overheads.</a:t>
+              <a:t>Revenue is 48.1% up on the same period last year, year to date ($454,340 against $306,750). Retainers make the highest gross margin (71.3%); Projects the lowest (60.5%). The business needs 45.8% gross margin just to cover overheads.</a:t>
             </a:r>
           </a:p>
         </p:txBody>
@@ -6493,7 +6493,7 @@
                 </a:solidFill>
                 <a:latin typeface="Roboto"/>
               </a:rPr>
-              <a:t>Projects: 56.3% gross margin, 16.3 points over the 40.0% target ($41,250 ahead on $253,250 this financial year to date). Retainers: 68.5% gross margin, 28.5 points over the 40.0% target ($37,020 ahead on $130,000 this financial year to date).</a:t>
+              <a:t>Projects: 60.5% gross margin, 20.5 points over the 40.0% target ($57,324 ahead on $280,040 this financial year to date). Retainers: 71.3% gross margin, 31.3 points over the 40.0% target ($44,700 ahead on $142,800 this financial year to date).</a:t>
             </a:r>
           </a:p>
         </p:txBody>
@@ -6571,7 +6571,7 @@
                 </a:solidFill>
                 <a:latin typeface="Roboto"/>
               </a:rPr>
-              <a:t>Data retrieved 2pm, Tue 6 Oct 2026 · Generated 8 Oct 2026, 9:35am · Sample data · Made with Python (python-pptx)</a:t>
+              <a:t>Data retrieved 2pm, Tue 6 Oct 2026 · Generated 9 Oct 2026, 8:41am · Sample data · Made with Python (python-pptx)</a:t>
             </a:r>
           </a:p>
         </p:txBody>
@@ -6956,7 +6956,7 @@
                 </a:solidFill>
                 <a:latin typeface="Roboto"/>
               </a:rPr>
-              <a:t>$12,105 against $45,860</a:t>
+              <a:t>$13,355 against $50,650</a:t>
             </a:r>
           </a:p>
         </p:txBody>
@@ -7083,7 +7083,7 @@
                 </a:solidFill>
                 <a:latin typeface="Roboto"/>
               </a:rPr>
-              <a:t>35.1%</a:t>
+              <a:t>35.4%</a:t>
             </a:r>
           </a:p>
         </p:txBody>
@@ -7122,7 +7122,7 @@
                 </a:solidFill>
                 <a:latin typeface="Roboto"/>
               </a:rPr>
-              <a:t>$253,250 against $187,490</a:t>
+              <a:t>$280,040 against $206,750</a:t>
             </a:r>
           </a:p>
         </p:txBody>
@@ -7249,7 +7249,7 @@
                 </a:solidFill>
                 <a:latin typeface="Roboto"/>
               </a:rPr>
-              <a:t>56.3%</a:t>
+              <a:t>60.5%</a:t>
             </a:r>
           </a:p>
         </p:txBody>
@@ -7288,7 +7288,7 @@
                 </a:solidFill>
                 <a:latin typeface="Roboto"/>
               </a:rPr>
-              <a:t>$142,550 before overheads</a:t>
+              <a:t>$169,340 before overheads</a:t>
             </a:r>
           </a:p>
         </p:txBody>
@@ -7433,7 +7433,7 @@
                 </a:solidFill>
                 <a:latin typeface="Roboto"/>
               </a:rPr>
-              <a:t>Projects brought in $253,250 this financial year to date, 35.1% on the same period last year (slower than the business as a whole, 47.8%), at a 56.3% gross margin (below the 60.3% overall).</a:t>
+              <a:t>Projects brought in $280,040 this financial year to date, 35.4% on the same period last year (slower than the business as a whole, 48.1%), at a 60.5% gross margin (below the 64.0% overall).</a:t>
             </a:r>
           </a:p>
         </p:txBody>
@@ -7560,7 +7560,7 @@
                 </a:solidFill>
                 <a:latin typeface="Roboto"/>
               </a:rPr>
-              <a:t>Projects: 56.3% gross margin, 16.3 points over the 40.0% target ($41,250 ahead on $253,250 this financial year to date).</a:t>
+              <a:t>Projects: 60.5% gross margin, 20.5 points over the 40.0% target ($57,324 ahead on $280,040 this financial year to date).</a:t>
             </a:r>
           </a:p>
         </p:txBody>
@@ -7638,7 +7638,7 @@
                 </a:solidFill>
                 <a:latin typeface="Roboto"/>
               </a:rPr>
-              <a:t>Data retrieved 2pm, Tue 6 Oct 2026 · Generated 8 Oct 2026, 9:35am · Sample data · Made with Python (python-pptx)</a:t>
+              <a:t>Data retrieved 2pm, Tue 6 Oct 2026 · Generated 9 Oct 2026, 8:41am · Sample data · Made with Python (python-pptx)</a:t>
             </a:r>
           </a:p>
         </p:txBody>
@@ -8023,7 +8023,7 @@
                 </a:solidFill>
                 <a:latin typeface="Roboto"/>
               </a:rPr>
-              <a:t>$32,500 against $16,300</a:t>
+              <a:t>$35,700 against $17,900</a:t>
             </a:r>
           </a:p>
         </p:txBody>
@@ -8189,7 +8189,7 @@
                 </a:solidFill>
                 <a:latin typeface="Roboto"/>
               </a:rPr>
-              <a:t>$130,000 against $65,200</a:t>
+              <a:t>$142,800 against $71,600</a:t>
             </a:r>
           </a:p>
         </p:txBody>
@@ -8316,7 +8316,7 @@
                 </a:solidFill>
                 <a:latin typeface="Roboto"/>
               </a:rPr>
-              <a:t>68.5%</a:t>
+              <a:t>71.3%</a:t>
             </a:r>
           </a:p>
         </p:txBody>
@@ -8355,7 +8355,7 @@
                 </a:solidFill>
                 <a:latin typeface="Roboto"/>
               </a:rPr>
-              <a:t>$89,020 before overheads</a:t>
+              <a:t>$101,820 before overheads</a:t>
             </a:r>
           </a:p>
         </p:txBody>
@@ -8500,7 +8500,7 @@
                 </a:solidFill>
                 <a:latin typeface="Roboto"/>
               </a:rPr>
-              <a:t>Retainers brought in $130,000 this financial year to date, 99.4% on the same period last year (faster than the business as a whole, 47.8%), at a 68.5% gross margin (above the 60.3% overall).</a:t>
+              <a:t>Retainers brought in $142,800 this financial year to date, 99.4% on the same period last year (faster than the business as a whole, 48.1%), at a 71.3% gross margin (above the 64.0% overall).</a:t>
             </a:r>
           </a:p>
         </p:txBody>
@@ -8627,7 +8627,7 @@
                 </a:solidFill>
                 <a:latin typeface="Roboto"/>
               </a:rPr>
-              <a:t>Retainers: 68.5% gross margin, 28.5 points over the 40.0% target ($37,020 ahead on $130,000 this financial year to date).</a:t>
+              <a:t>Retainers: 71.3% gross margin, 31.3 points over the 40.0% target ($44,700 ahead on $142,800 this financial year to date).</a:t>
             </a:r>
           </a:p>
         </p:txBody>
@@ -8705,7 +8705,7 @@
                 </a:solidFill>
                 <a:latin typeface="Roboto"/>
               </a:rPr>
-              <a:t>Data retrieved 2pm, Tue 6 Oct 2026 · Generated 8 Oct 2026, 9:35am · Sample data · Made with Python (python-pptx)</a:t>
+              <a:t>Data retrieved 2pm, Tue 6 Oct 2026 · Generated 9 Oct 2026, 8:41am · Sample data · Made with Python (python-pptx)</a:t>
             </a:r>
           </a:p>
         </p:txBody>
@@ -9090,7 +9090,7 @@
                 </a:solidFill>
                 <a:latin typeface="Roboto"/>
               </a:rPr>
-              <a:t>$0 against $9,100</a:t>
+              <a:t>$0 against $10,000</a:t>
             </a:r>
           </a:p>
         </p:txBody>
@@ -9217,7 +9217,7 @@
                 </a:solidFill>
                 <a:latin typeface="Roboto"/>
               </a:rPr>
-              <a:t>10.4%</a:t>
+              <a:t>10.9%</a:t>
             </a:r>
           </a:p>
         </p:txBody>
@@ -9256,7 +9256,7 @@
                 </a:solidFill>
                 <a:latin typeface="Roboto"/>
               </a:rPr>
-              <a:t>$28,600 against $25,900</a:t>
+              <a:t>$31,500 against $28,400</a:t>
             </a:r>
           </a:p>
         </p:txBody>
@@ -9383,7 +9383,7 @@
                 </a:solidFill>
                 <a:latin typeface="Roboto"/>
               </a:rPr>
-              <a:t>58.0%</a:t>
+              <a:t>61.9%</a:t>
             </a:r>
           </a:p>
         </p:txBody>
@@ -9422,7 +9422,7 @@
                 </a:solidFill>
                 <a:latin typeface="Roboto"/>
               </a:rPr>
-              <a:t>$16,600 before overheads</a:t>
+              <a:t>$19,500 before overheads</a:t>
             </a:r>
           </a:p>
         </p:txBody>
@@ -9567,7 +9567,7 @@
                 </a:solidFill>
                 <a:latin typeface="Roboto"/>
               </a:rPr>
-              <a:t>Training brought in $28,600 this financial year to date, 10.4% on the same period last year (slower than the business as a whole, 47.8%), at a 58.0% gross margin (below the 60.3% overall).</a:t>
+              <a:t>Training brought in $31,500 this financial year to date, 10.9% on the same period last year (slower than the business as a whole, 48.1%), at a 61.9% gross margin (below the 64.0% overall).</a:t>
             </a:r>
           </a:p>
         </p:txBody>
@@ -9694,7 +9694,7 @@
                 </a:solidFill>
                 <a:latin typeface="Roboto"/>
               </a:rPr>
-              <a:t>Training: 58.0% gross margin, 18.0 points over the 40.0% target ($5,160 ahead on $28,600 this financial year to date).</a:t>
+              <a:t>Training: 61.9% gross margin, 21.9 points over the 40.0% target ($6,900 ahead on $31,500 this financial year to date).</a:t>
             </a:r>
           </a:p>
         </p:txBody>
@@ -9772,7 +9772,7 @@
                 </a:solidFill>
                 <a:latin typeface="Roboto"/>
               </a:rPr>
-              <a:t>Data retrieved 2pm, Tue 6 Oct 2026 · Generated 8 Oct 2026, 9:35am · Sample data · Made with Python (python-pptx)</a:t>
+              <a:t>Data retrieved 2pm, Tue 6 Oct 2026 · Generated 9 Oct 2026, 8:41am · Sample data · Made with Python (python-pptx)</a:t>
             </a:r>
           </a:p>
         </p:txBody>
@@ -9991,7 +9991,7 @@
                 </a:solidFill>
                 <a:latin typeface="Roboto"/>
               </a:rPr>
-              <a:t>From gross margin to profit · latest closed month: September: October is still in progress and wages are paid fortnightly, so a part month can't be bridged: this is September, the latest closed month. September's client work made $68,410 gross margin (51.9%). Consultant time not charged to client work took $660 and overheads $52,140, leaving $15,610 profit before tax (11.8% of revenue). To cover overheads, client work needs a 40.0% gross margin on average.</a:t>
+              <a:t>From gross margin to profit · latest closed month: September: October is still in progress and wages are paid fortnightly, so a part month can't be bridged: this is September, the latest closed month. September's client work made $81,890 gross margin (56.3%). Consultant time not charged to client work took $14,352 and overheads $52,140, leaving $15,398 profit before tax (10.6% of revenue). To cover overheads, client work needs a 45.8% gross margin on average.</a:t>
             </a:r>
           </a:p>
         </p:txBody>
@@ -10222,7 +10222,7 @@
                           </a:solidFill>
                           <a:latin typeface="Roboto"/>
                         </a:rPr>
-                        <a:t>$253,250</a:t>
+                        <a:t>$280,040</a:t>
                       </a:r>
                     </a:p>
                   </a:txBody>
@@ -10249,7 +10249,7 @@
                           </a:solidFill>
                           <a:latin typeface="Roboto"/>
                         </a:rPr>
-                        <a:t>$187,490</a:t>
+                        <a:t>$206,750</a:t>
                       </a:r>
                     </a:p>
                   </a:txBody>
@@ -10276,7 +10276,7 @@
                           </a:solidFill>
                           <a:latin typeface="Roboto"/>
                         </a:rPr>
-                        <a:t>35.1%</a:t>
+                        <a:t>35.4%</a:t>
                       </a:r>
                     </a:p>
                   </a:txBody>
@@ -10303,7 +10303,7 @@
                           </a:solidFill>
                           <a:latin typeface="Roboto"/>
                         </a:rPr>
-                        <a:t>$142,550</a:t>
+                        <a:t>$169,340</a:t>
                       </a:r>
                     </a:p>
                   </a:txBody>
@@ -10330,7 +10330,7 @@
                           </a:solidFill>
                           <a:latin typeface="Roboto"/>
                         </a:rPr>
-                        <a:t>56.3%</a:t>
+                        <a:t>60.5%</a:t>
                       </a:r>
                     </a:p>
                   </a:txBody>
@@ -10386,7 +10386,7 @@
                           </a:solidFill>
                           <a:latin typeface="Roboto"/>
                         </a:rPr>
-                        <a:t>$130,000</a:t>
+                        <a:t>$142,800</a:t>
                       </a:r>
                     </a:p>
                   </a:txBody>
@@ -10413,7 +10413,7 @@
                           </a:solidFill>
                           <a:latin typeface="Roboto"/>
                         </a:rPr>
-                        <a:t>$65,200</a:t>
+                        <a:t>$71,600</a:t>
                       </a:r>
                     </a:p>
                   </a:txBody>
@@ -10467,7 +10467,7 @@
                           </a:solidFill>
                           <a:latin typeface="Roboto"/>
                         </a:rPr>
-                        <a:t>$89,020</a:t>
+                        <a:t>$101,820</a:t>
                       </a:r>
                     </a:p>
                   </a:txBody>
@@ -10494,7 +10494,7 @@
                           </a:solidFill>
                           <a:latin typeface="Roboto"/>
                         </a:rPr>
-                        <a:t>68.5%</a:t>
+                        <a:t>71.3%</a:t>
                       </a:r>
                     </a:p>
                   </a:txBody>
@@ -10550,7 +10550,7 @@
                           </a:solidFill>
                           <a:latin typeface="Roboto"/>
                         </a:rPr>
-                        <a:t>$28,600</a:t>
+                        <a:t>$31,500</a:t>
                       </a:r>
                     </a:p>
                   </a:txBody>
@@ -10577,7 +10577,7 @@
                           </a:solidFill>
                           <a:latin typeface="Roboto"/>
                         </a:rPr>
-                        <a:t>$25,900</a:t>
+                        <a:t>$28,400</a:t>
                       </a:r>
                     </a:p>
                   </a:txBody>
@@ -10604,7 +10604,7 @@
                           </a:solidFill>
                           <a:latin typeface="Roboto"/>
                         </a:rPr>
-                        <a:t>10.4%</a:t>
+                        <a:t>10.9%</a:t>
                       </a:r>
                     </a:p>
                   </a:txBody>
@@ -10631,7 +10631,7 @@
                           </a:solidFill>
                           <a:latin typeface="Roboto"/>
                         </a:rPr>
-                        <a:t>$16,600</a:t>
+                        <a:t>$19,500</a:t>
                       </a:r>
                     </a:p>
                   </a:txBody>
@@ -10658,7 +10658,7 @@
                           </a:solidFill>
                           <a:latin typeface="Roboto"/>
                         </a:rPr>
-                        <a:t>58.0%</a:t>
+                        <a:t>61.9%</a:t>
                       </a:r>
                     </a:p>
                   </a:txBody>
@@ -10714,7 +10714,7 @@
                           </a:solidFill>
                           <a:latin typeface="Roboto"/>
                         </a:rPr>
-                        <a:t>$411,850</a:t>
+                        <a:t>$454,340</a:t>
                       </a:r>
                     </a:p>
                   </a:txBody>
@@ -10741,7 +10741,7 @@
                           </a:solidFill>
                           <a:latin typeface="Roboto"/>
                         </a:rPr>
-                        <a:t>$278,590</a:t>
+                        <a:t>$306,750</a:t>
                       </a:r>
                     </a:p>
                   </a:txBody>
@@ -10768,7 +10768,7 @@
                           </a:solidFill>
                           <a:latin typeface="Roboto"/>
                         </a:rPr>
-                        <a:t>47.8%</a:t>
+                        <a:t>48.1%</a:t>
                       </a:r>
                     </a:p>
                   </a:txBody>
@@ -10795,7 +10795,7 @@
                           </a:solidFill>
                           <a:latin typeface="Roboto"/>
                         </a:rPr>
-                        <a:t>$248,170</a:t>
+                        <a:t>$290,660</a:t>
                       </a:r>
                     </a:p>
                   </a:txBody>
@@ -10822,7 +10822,7 @@
                           </a:solidFill>
                           <a:latin typeface="Roboto"/>
                         </a:rPr>
-                        <a:t>60.3%</a:t>
+                        <a:t>64.0%</a:t>
                       </a:r>
                     </a:p>
                   </a:txBody>
@@ -10910,7 +10910,7 @@
                 </a:solidFill>
                 <a:latin typeface="Roboto"/>
               </a:rPr>
-              <a:t>Data retrieved 2pm, Tue 6 Oct 2026 · Generated 8 Oct 2026, 9:35am · Sample data · Made with Python (python-pptx)</a:t>
+              <a:t>Data retrieved 2pm, Tue 6 Oct 2026 · Generated 9 Oct 2026, 8:41am · Sample data · Made with Python (python-pptx)</a:t>
             </a:r>
           </a:p>
         </p:txBody>
